--- a/fiches_outils/Fiche_technique_RTU.pptx
+++ b/fiches_outils/Fiche_technique_RTU.pptx
@@ -13505,7 +13505,7 @@
         </p:nvSpPr>
         <p:spPr>
           <a:xfrm>
-            <a:off x="4089400" y="10063480"/>
+            <a:off x="4089400" y="9911080"/>
             <a:ext cx="2755900" cy="177800"/>
           </a:xfrm>
           <a:prstGeom prst="rect">
@@ -13547,7 +13547,7 @@
         </p:nvSpPr>
         <p:spPr>
           <a:xfrm>
-            <a:off x="4089400" y="10253980"/>
+            <a:off x="4089400" y="10101580"/>
             <a:ext cx="2755900" cy="508000"/>
           </a:xfrm>
           <a:prstGeom prst="rect">
